--- a/deliverables/1784786903168-17720/AKKODiSマーケティングポータル_課題AsIs-ToBe提案書.pptx
+++ b/deliverables/1784786903168-17720/AKKODiSマーケティングポータル_課題AsIs-ToBe提案書.pptx
@@ -15,6 +15,7 @@
     <p:sldId id="263" r:id="rId14"/>
     <p:sldId id="264" r:id="rId15"/>
     <p:sldId id="265" r:id="rId16"/>
+    <p:sldId id="266" r:id="rId17"/>
   </p:sldIdLst>
   <p:sldSz cx="12191695" cy="6858000" type="screen4x3"/>
   <p:notesSz cx="6858000" cy="9144000"/>
@@ -3567,7 +3568,7 @@
                 <a:latin typeface="Meiryo UI"/>
                 <a:ea typeface="Meiryo UI"/>
               </a:rPr>
-              <a:t>次ステップ</a:t>
+              <a:t>次ステップ（1/2）</a:t>
             </a:r>
           </a:p>
         </p:txBody>
@@ -3607,7 +3608,7 @@
                 <a:latin typeface="Meiryo UI"/>
                 <a:ea typeface="Meiryo UI"/>
               </a:rPr>
-              <a:t>フェーズ計画（F0〜F4）と社長判断3点（docs/02 §6）</a:t>
+              <a:t>フェーズ計画（F0〜F4・各フェーズの完了条件）（docs/02 §6-1）</a:t>
             </a:r>
           </a:p>
         </p:txBody>
@@ -3789,7 +3790,7 @@
         <p:spPr>
           <a:xfrm>
             <a:off x="320040" y="1435608"/>
-            <a:ext cx="2176272" cy="1417320"/>
+            <a:ext cx="2176272" cy="1783080"/>
           </a:xfrm>
           <a:prstGeom prst="rect">
             <a:avLst/>
@@ -3835,7 +3836,7 @@
         <p:spPr>
           <a:xfrm>
             <a:off x="393192" y="1508760"/>
-            <a:ext cx="2048256" cy="1051560"/>
+            <a:ext cx="2048256" cy="896112"/>
           </a:xfrm>
           <a:prstGeom prst="rect">
             <a:avLst/>
@@ -3854,7 +3855,7 @@
               </a:lnSpc>
             </a:pPr>
             <a:r>
-              <a:rPr sz="819" b="0" i="0">
+              <a:rPr sz="780" b="0" i="0">
                 <a:solidFill>
                   <a:srgbClr val="333333"/>
                 </a:solidFill>
@@ -3874,7 +3875,47 @@
         </p:nvSpPr>
         <p:spPr>
           <a:xfrm>
-            <a:off x="393192" y="2624328"/>
+            <a:off x="393192" y="2423160"/>
+            <a:ext cx="2048256" cy="365760"/>
+          </a:xfrm>
+          <a:prstGeom prst="rect">
+            <a:avLst/>
+          </a:prstGeom>
+          <a:noFill/>
+        </p:spPr>
+        <p:txBody>
+          <a:bodyPr wrap="square" anchor="t" lIns="0" rIns="0" tIns="0" bIns="0">
+            <a:spAutoFit/>
+          </a:bodyPr>
+          <a:lstStyle/>
+          <a:p>
+            <a:pPr algn="l">
+              <a:lnSpc>
+                <a:spcPct val="105000"/>
+              </a:lnSpc>
+            </a:pPr>
+            <a:r>
+              <a:rPr sz="730" b="1" i="0">
+                <a:solidFill>
+                  <a:srgbClr val="001F33"/>
+                </a:solidFill>
+                <a:latin typeface="Meiryo UI"/>
+                <a:ea typeface="Meiryo UI"/>
+              </a:rPr>
+              <a:t>完了条件：実行可能範囲(L1/L2/L3)確定</a:t>
+            </a:r>
+          </a:p>
+        </p:txBody>
+      </p:sp>
+      <p:sp>
+        <p:nvSpPr>
+          <p:cNvPr id="13" name="TextBox 12"/>
+          <p:cNvSpPr txBox="1"/>
+          <p:nvPr/>
+        </p:nvSpPr>
+        <p:spPr>
+          <a:xfrm>
+            <a:off x="393192" y="2990088"/>
             <a:ext cx="2048256" cy="201168"/>
           </a:xfrm>
           <a:prstGeom prst="rect">
@@ -3908,7 +3949,7 @@
       </p:sp>
       <p:sp>
         <p:nvSpPr>
-          <p:cNvPr id="13" name="Rectangle 12"/>
+          <p:cNvPr id="14" name="Rectangle 13"/>
           <p:cNvSpPr/>
           <p:nvPr/>
         </p:nvSpPr>
@@ -3952,7 +3993,7 @@
       </p:sp>
       <p:sp>
         <p:nvSpPr>
-          <p:cNvPr id="14" name="TextBox 13"/>
+          <p:cNvPr id="15" name="TextBox 14"/>
           <p:cNvSpPr txBox="1"/>
           <p:nvPr/>
         </p:nvSpPr>
@@ -3992,14 +4033,14 @@
       </p:sp>
       <p:sp>
         <p:nvSpPr>
-          <p:cNvPr id="15" name="Rectangle 14"/>
+          <p:cNvPr id="16" name="Rectangle 15"/>
           <p:cNvSpPr/>
           <p:nvPr/>
         </p:nvSpPr>
         <p:spPr>
           <a:xfrm>
             <a:off x="2551176" y="1435608"/>
-            <a:ext cx="2176272" cy="1417320"/>
+            <a:ext cx="2176272" cy="1783080"/>
           </a:xfrm>
           <a:prstGeom prst="rect">
             <a:avLst/>
@@ -4038,14 +4079,14 @@
       </p:sp>
       <p:sp>
         <p:nvSpPr>
-          <p:cNvPr id="16" name="TextBox 15"/>
+          <p:cNvPr id="17" name="TextBox 16"/>
           <p:cNvSpPr txBox="1"/>
           <p:nvPr/>
         </p:nvSpPr>
         <p:spPr>
           <a:xfrm>
             <a:off x="2624328" y="1508760"/>
-            <a:ext cx="2048256" cy="1051560"/>
+            <a:ext cx="2048256" cy="896112"/>
           </a:xfrm>
           <a:prstGeom prst="rect">
             <a:avLst/>
@@ -4064,7 +4105,7 @@
               </a:lnSpc>
             </a:pPr>
             <a:r>
-              <a:rPr sz="819" b="0" i="0">
+              <a:rPr sz="780" b="0" i="0">
                 <a:solidFill>
                   <a:srgbClr val="333333"/>
                 </a:solidFill>
@@ -4078,13 +4119,53 @@
       </p:sp>
       <p:sp>
         <p:nvSpPr>
-          <p:cNvPr id="17" name="TextBox 16"/>
-          <p:cNvSpPr txBox="1"/>
-          <p:nvPr/>
-        </p:nvSpPr>
-        <p:spPr>
-          <a:xfrm>
-            <a:off x="2624328" y="2624328"/>
+          <p:cNvPr id="18" name="TextBox 17"/>
+          <p:cNvSpPr txBox="1"/>
+          <p:nvPr/>
+        </p:nvSpPr>
+        <p:spPr>
+          <a:xfrm>
+            <a:off x="2624328" y="2423160"/>
+            <a:ext cx="2048256" cy="365760"/>
+          </a:xfrm>
+          <a:prstGeom prst="rect">
+            <a:avLst/>
+          </a:prstGeom>
+          <a:noFill/>
+        </p:spPr>
+        <p:txBody>
+          <a:bodyPr wrap="square" anchor="t" lIns="0" rIns="0" tIns="0" bIns="0">
+            <a:spAutoFit/>
+          </a:bodyPr>
+          <a:lstStyle/>
+          <a:p>
+            <a:pPr algn="l">
+              <a:lnSpc>
+                <a:spcPct val="105000"/>
+              </a:lnSpc>
+            </a:pPr>
+            <a:r>
+              <a:rPr sz="730" b="1" i="0">
+                <a:solidFill>
+                  <a:srgbClr val="001F33"/>
+                </a:solidFill>
+                <a:latin typeface="Meiryo UI"/>
+                <a:ea typeface="Meiryo UI"/>
+              </a:rPr>
+              <a:t>完了条件：Must範囲を社長承認</a:t>
+            </a:r>
+          </a:p>
+        </p:txBody>
+      </p:sp>
+      <p:sp>
+        <p:nvSpPr>
+          <p:cNvPr id="19" name="TextBox 18"/>
+          <p:cNvSpPr txBox="1"/>
+          <p:nvPr/>
+        </p:nvSpPr>
+        <p:spPr>
+          <a:xfrm>
+            <a:off x="2624328" y="2990088"/>
             <a:ext cx="2048256" cy="201168"/>
           </a:xfrm>
           <a:prstGeom prst="rect">
@@ -4118,7 +4199,7 @@
       </p:sp>
       <p:sp>
         <p:nvSpPr>
-          <p:cNvPr id="18" name="Rectangle 17"/>
+          <p:cNvPr id="20" name="Rectangle 19"/>
           <p:cNvSpPr/>
           <p:nvPr/>
         </p:nvSpPr>
@@ -4162,7 +4243,7 @@
       </p:sp>
       <p:sp>
         <p:nvSpPr>
-          <p:cNvPr id="19" name="TextBox 18"/>
+          <p:cNvPr id="21" name="TextBox 20"/>
           <p:cNvSpPr txBox="1"/>
           <p:nvPr/>
         </p:nvSpPr>
@@ -4202,14 +4283,14 @@
       </p:sp>
       <p:sp>
         <p:nvSpPr>
-          <p:cNvPr id="20" name="Rectangle 19"/>
+          <p:cNvPr id="22" name="Rectangle 21"/>
           <p:cNvSpPr/>
           <p:nvPr/>
         </p:nvSpPr>
         <p:spPr>
           <a:xfrm>
             <a:off x="4782312" y="1435608"/>
-            <a:ext cx="2176272" cy="1417320"/>
+            <a:ext cx="2176272" cy="1783080"/>
           </a:xfrm>
           <a:prstGeom prst="rect">
             <a:avLst/>
@@ -4248,14 +4329,14 @@
       </p:sp>
       <p:sp>
         <p:nvSpPr>
-          <p:cNvPr id="21" name="TextBox 20"/>
+          <p:cNvPr id="23" name="TextBox 22"/>
           <p:cNvSpPr txBox="1"/>
           <p:nvPr/>
         </p:nvSpPr>
         <p:spPr>
           <a:xfrm>
             <a:off x="4855464" y="1508760"/>
-            <a:ext cx="2048256" cy="1051560"/>
+            <a:ext cx="2048256" cy="896112"/>
           </a:xfrm>
           <a:prstGeom prst="rect">
             <a:avLst/>
@@ -4274,7 +4355,7 @@
               </a:lnSpc>
             </a:pPr>
             <a:r>
-              <a:rPr sz="819" b="0" i="0">
+              <a:rPr sz="780" b="0" i="0">
                 <a:solidFill>
                   <a:srgbClr val="333333"/>
                 </a:solidFill>
@@ -4288,13 +4369,53 @@
       </p:sp>
       <p:sp>
         <p:nvSpPr>
-          <p:cNvPr id="22" name="TextBox 21"/>
-          <p:cNvSpPr txBox="1"/>
-          <p:nvPr/>
-        </p:nvSpPr>
-        <p:spPr>
-          <a:xfrm>
-            <a:off x="4855464" y="2624328"/>
+          <p:cNvPr id="24" name="TextBox 23"/>
+          <p:cNvSpPr txBox="1"/>
+          <p:nvPr/>
+        </p:nvSpPr>
+        <p:spPr>
+          <a:xfrm>
+            <a:off x="4855464" y="2423160"/>
+            <a:ext cx="2048256" cy="365760"/>
+          </a:xfrm>
+          <a:prstGeom prst="rect">
+            <a:avLst/>
+          </a:prstGeom>
+          <a:noFill/>
+        </p:spPr>
+        <p:txBody>
+          <a:bodyPr wrap="square" anchor="t" lIns="0" rIns="0" tIns="0" bIns="0">
+            <a:spAutoFit/>
+          </a:bodyPr>
+          <a:lstStyle/>
+          <a:p>
+            <a:pPr algn="l">
+              <a:lnSpc>
+                <a:spcPct val="105000"/>
+              </a:lnSpc>
+            </a:pPr>
+            <a:r>
+              <a:rPr sz="730" b="1" i="0">
+                <a:solidFill>
+                  <a:srgbClr val="001F33"/>
+                </a:solidFill>
+                <a:latin typeface="Meiryo UI"/>
+                <a:ea typeface="Meiryo UI"/>
+              </a:rPr>
+              <a:t>完了条件：設計レビュー通過</a:t>
+            </a:r>
+          </a:p>
+        </p:txBody>
+      </p:sp>
+      <p:sp>
+        <p:nvSpPr>
+          <p:cNvPr id="25" name="TextBox 24"/>
+          <p:cNvSpPr txBox="1"/>
+          <p:nvPr/>
+        </p:nvSpPr>
+        <p:spPr>
+          <a:xfrm>
+            <a:off x="4855464" y="2990088"/>
             <a:ext cx="2048256" cy="201168"/>
           </a:xfrm>
           <a:prstGeom prst="rect">
@@ -4328,7 +4449,7 @@
       </p:sp>
       <p:sp>
         <p:nvSpPr>
-          <p:cNvPr id="23" name="Rectangle 22"/>
+          <p:cNvPr id="26" name="Rectangle 25"/>
           <p:cNvSpPr/>
           <p:nvPr/>
         </p:nvSpPr>
@@ -4372,7 +4493,7 @@
       </p:sp>
       <p:sp>
         <p:nvSpPr>
-          <p:cNvPr id="24" name="TextBox 23"/>
+          <p:cNvPr id="27" name="TextBox 26"/>
           <p:cNvSpPr txBox="1"/>
           <p:nvPr/>
         </p:nvSpPr>
@@ -4412,14 +4533,14 @@
       </p:sp>
       <p:sp>
         <p:nvSpPr>
-          <p:cNvPr id="25" name="Rectangle 24"/>
+          <p:cNvPr id="28" name="Rectangle 27"/>
           <p:cNvSpPr/>
           <p:nvPr/>
         </p:nvSpPr>
         <p:spPr>
           <a:xfrm>
             <a:off x="7013448" y="1435608"/>
-            <a:ext cx="2176272" cy="1417320"/>
+            <a:ext cx="2176272" cy="1783080"/>
           </a:xfrm>
           <a:prstGeom prst="rect">
             <a:avLst/>
@@ -4458,14 +4579,14 @@
       </p:sp>
       <p:sp>
         <p:nvSpPr>
-          <p:cNvPr id="26" name="TextBox 25"/>
+          <p:cNvPr id="29" name="TextBox 28"/>
           <p:cNvSpPr txBox="1"/>
           <p:nvPr/>
         </p:nvSpPr>
         <p:spPr>
           <a:xfrm>
             <a:off x="7086600" y="1508760"/>
-            <a:ext cx="2048256" cy="1051560"/>
+            <a:ext cx="2048256" cy="896112"/>
           </a:xfrm>
           <a:prstGeom prst="rect">
             <a:avLst/>
@@ -4484,7 +4605,7 @@
               </a:lnSpc>
             </a:pPr>
             <a:r>
-              <a:rPr sz="819" b="0" i="0">
+              <a:rPr sz="780" b="0" i="0">
                 <a:solidFill>
                   <a:srgbClr val="333333"/>
                 </a:solidFill>
@@ -4498,13 +4619,53 @@
       </p:sp>
       <p:sp>
         <p:nvSpPr>
-          <p:cNvPr id="27" name="TextBox 26"/>
-          <p:cNvSpPr txBox="1"/>
-          <p:nvPr/>
-        </p:nvSpPr>
-        <p:spPr>
-          <a:xfrm>
-            <a:off x="7086600" y="2624328"/>
+          <p:cNvPr id="30" name="TextBox 29"/>
+          <p:cNvSpPr txBox="1"/>
+          <p:nvPr/>
+        </p:nvSpPr>
+        <p:spPr>
+          <a:xfrm>
+            <a:off x="7086600" y="2423160"/>
+            <a:ext cx="2048256" cy="365760"/>
+          </a:xfrm>
+          <a:prstGeom prst="rect">
+            <a:avLst/>
+          </a:prstGeom>
+          <a:noFill/>
+        </p:spPr>
+        <p:txBody>
+          <a:bodyPr wrap="square" anchor="t" lIns="0" rIns="0" tIns="0" bIns="0">
+            <a:spAutoFit/>
+          </a:bodyPr>
+          <a:lstStyle/>
+          <a:p>
+            <a:pPr algn="l">
+              <a:lnSpc>
+                <a:spcPct val="105000"/>
+              </a:lnSpc>
+            </a:pPr>
+            <a:r>
+              <a:rPr sz="730" b="1" i="0">
+                <a:solidFill>
+                  <a:srgbClr val="001F33"/>
+                </a:solidFill>
+                <a:latin typeface="Meiryo UI"/>
+                <a:ea typeface="Meiryo UI"/>
+              </a:rPr>
+              <a:t>完了条件：B-1/G-2/CA-1のユーザー検証合格</a:t>
+            </a:r>
+          </a:p>
+        </p:txBody>
+      </p:sp>
+      <p:sp>
+        <p:nvSpPr>
+          <p:cNvPr id="31" name="TextBox 30"/>
+          <p:cNvSpPr txBox="1"/>
+          <p:nvPr/>
+        </p:nvSpPr>
+        <p:spPr>
+          <a:xfrm>
+            <a:off x="7086600" y="2990088"/>
             <a:ext cx="2048256" cy="201168"/>
           </a:xfrm>
           <a:prstGeom prst="rect">
@@ -4538,7 +4699,7 @@
       </p:sp>
       <p:sp>
         <p:nvSpPr>
-          <p:cNvPr id="28" name="Rectangle 27"/>
+          <p:cNvPr id="32" name="Rectangle 31"/>
           <p:cNvSpPr/>
           <p:nvPr/>
         </p:nvSpPr>
@@ -4582,7 +4743,7 @@
       </p:sp>
       <p:sp>
         <p:nvSpPr>
-          <p:cNvPr id="29" name="TextBox 28"/>
+          <p:cNvPr id="33" name="TextBox 32"/>
           <p:cNvSpPr txBox="1"/>
           <p:nvPr/>
         </p:nvSpPr>
@@ -4622,14 +4783,14 @@
       </p:sp>
       <p:sp>
         <p:nvSpPr>
-          <p:cNvPr id="30" name="Rectangle 29"/>
+          <p:cNvPr id="34" name="Rectangle 33"/>
           <p:cNvSpPr/>
           <p:nvPr/>
         </p:nvSpPr>
         <p:spPr>
           <a:xfrm>
             <a:off x="9244584" y="1435608"/>
-            <a:ext cx="2176272" cy="1417320"/>
+            <a:ext cx="2176272" cy="1783080"/>
           </a:xfrm>
           <a:prstGeom prst="rect">
             <a:avLst/>
@@ -4668,14 +4829,14 @@
       </p:sp>
       <p:sp>
         <p:nvSpPr>
-          <p:cNvPr id="31" name="TextBox 30"/>
+          <p:cNvPr id="35" name="TextBox 34"/>
           <p:cNvSpPr txBox="1"/>
           <p:nvPr/>
         </p:nvSpPr>
         <p:spPr>
           <a:xfrm>
             <a:off x="9317736" y="1508760"/>
-            <a:ext cx="2048256" cy="1051560"/>
+            <a:ext cx="2048256" cy="896112"/>
           </a:xfrm>
           <a:prstGeom prst="rect">
             <a:avLst/>
@@ -4694,7 +4855,7 @@
               </a:lnSpc>
             </a:pPr>
             <a:r>
-              <a:rPr sz="819" b="0" i="0">
+              <a:rPr sz="780" b="0" i="0">
                 <a:solidFill>
                   <a:srgbClr val="333333"/>
                 </a:solidFill>
@@ -4708,13 +4869,53 @@
       </p:sp>
       <p:sp>
         <p:nvSpPr>
-          <p:cNvPr id="32" name="TextBox 31"/>
-          <p:cNvSpPr txBox="1"/>
-          <p:nvPr/>
-        </p:nvSpPr>
-        <p:spPr>
-          <a:xfrm>
-            <a:off x="9317736" y="2624328"/>
+          <p:cNvPr id="36" name="TextBox 35"/>
+          <p:cNvSpPr txBox="1"/>
+          <p:nvPr/>
+        </p:nvSpPr>
+        <p:spPr>
+          <a:xfrm>
+            <a:off x="9317736" y="2423160"/>
+            <a:ext cx="2048256" cy="365760"/>
+          </a:xfrm>
+          <a:prstGeom prst="rect">
+            <a:avLst/>
+          </a:prstGeom>
+          <a:noFill/>
+        </p:spPr>
+        <p:txBody>
+          <a:bodyPr wrap="square" anchor="t" lIns="0" rIns="0" tIns="0" bIns="0">
+            <a:spAutoFit/>
+          </a:bodyPr>
+          <a:lstStyle/>
+          <a:p>
+            <a:pPr algn="l">
+              <a:lnSpc>
+                <a:spcPct val="105000"/>
+              </a:lnSpc>
+            </a:pPr>
+            <a:r>
+              <a:rPr sz="730" b="1" i="0">
+                <a:solidFill>
+                  <a:srgbClr val="001F33"/>
+                </a:solidFill>
+                <a:latin typeface="Meiryo UI"/>
+                <a:ea typeface="Meiryo UI"/>
+              </a:rPr>
+              <a:t>完了条件：ライセンス承認済み機能のみ稼働</a:t>
+            </a:r>
+          </a:p>
+        </p:txBody>
+      </p:sp>
+      <p:sp>
+        <p:nvSpPr>
+          <p:cNvPr id="37" name="TextBox 36"/>
+          <p:cNvSpPr txBox="1"/>
+          <p:nvPr/>
+        </p:nvSpPr>
+        <p:spPr>
+          <a:xfrm>
+            <a:off x="9317736" y="2990088"/>
             <a:ext cx="2048256" cy="201168"/>
           </a:xfrm>
           <a:prstGeom prst="rect">
@@ -4748,7 +4949,7 @@
       </p:sp>
       <p:sp>
         <p:nvSpPr>
-          <p:cNvPr id="33" name="TextBox 32"/>
+          <p:cNvPr id="38" name="TextBox 37"/>
           <p:cNvSpPr txBox="1"/>
           <p:nvPr/>
         </p:nvSpPr>
@@ -4788,7 +4989,7 @@
       </p:sp>
       <p:sp>
         <p:nvSpPr>
-          <p:cNvPr id="34" name="TextBox 33"/>
+          <p:cNvPr id="39" name="TextBox 38"/>
           <p:cNvSpPr txBox="1"/>
           <p:nvPr/>
         </p:nvSpPr>
@@ -4828,7 +5029,7 @@
       </p:sp>
       <p:sp>
         <p:nvSpPr>
-          <p:cNvPr id="35" name="TextBox 34"/>
+          <p:cNvPr id="40" name="TextBox 39"/>
           <p:cNvSpPr txBox="1"/>
           <p:nvPr/>
         </p:nvSpPr>
@@ -4868,7 +5069,7 @@
       </p:sp>
       <p:sp>
         <p:nvSpPr>
-          <p:cNvPr id="36" name="TextBox 35"/>
+          <p:cNvPr id="41" name="TextBox 40"/>
           <p:cNvSpPr txBox="1"/>
           <p:nvPr/>
         </p:nvSpPr>
@@ -4908,14 +5109,14 @@
       </p:sp>
       <p:sp>
         <p:nvSpPr>
-          <p:cNvPr id="37" name="TextBox 36"/>
-          <p:cNvSpPr txBox="1"/>
-          <p:nvPr/>
-        </p:nvSpPr>
-        <p:spPr>
-          <a:xfrm>
-            <a:off x="320040" y="2834640"/>
-            <a:ext cx="5486400" cy="219456"/>
+          <p:cNvPr id="42" name="TextBox 41"/>
+          <p:cNvSpPr txBox="1"/>
+          <p:nvPr/>
+        </p:nvSpPr>
+        <p:spPr>
+          <a:xfrm>
+            <a:off x="320040" y="3328416"/>
+            <a:ext cx="11521440" cy="219456"/>
           </a:xfrm>
           <a:prstGeom prst="rect">
             <a:avLst/>
@@ -4948,14 +5149,14 @@
       </p:sp>
       <p:sp>
         <p:nvSpPr>
-          <p:cNvPr id="38" name="TextBox 37"/>
-          <p:cNvSpPr txBox="1"/>
-          <p:nvPr/>
-        </p:nvSpPr>
-        <p:spPr>
-          <a:xfrm>
-            <a:off x="320040" y="3246120"/>
-            <a:ext cx="5486400" cy="237744"/>
+          <p:cNvPr id="43" name="TextBox 42"/>
+          <p:cNvSpPr txBox="1"/>
+          <p:nvPr/>
+        </p:nvSpPr>
+        <p:spPr>
+          <a:xfrm>
+            <a:off x="320040" y="3602736"/>
+            <a:ext cx="11521440" cy="457200"/>
           </a:xfrm>
           <a:prstGeom prst="rect">
             <a:avLst/>
@@ -4974,28 +5175,170 @@
               </a:lnSpc>
             </a:pPr>
             <a:r>
-              <a:rPr sz="1300" b="1" i="0">
-                <a:solidFill>
-                  <a:srgbClr val="001F33"/>
-                </a:solidFill>
-                <a:latin typeface="Meiryo UI"/>
-                <a:ea typeface="Meiryo UI"/>
-              </a:rPr>
-              <a:t>社長にご判断・ご確認いただきたい点（3点）</a:t>
-            </a:r>
-          </a:p>
-        </p:txBody>
-      </p:sp>
-      <p:sp>
-        <p:nvSpPr>
-          <p:cNvPr id="39" name="Rectangle 38"/>
+              <a:rPr sz="900" b="0" i="0">
+                <a:solidFill>
+                  <a:srgbClr val="666666"/>
+                </a:solidFill>
+                <a:latin typeface="Meiryo UI"/>
+                <a:ea typeface="Meiryo UI"/>
+              </a:rPr>
+              <a:t>本計画は全22課題を同時実装するものではない。MVP（L1の4点）を軸に、同時着手可能な低コストのクイックウィン（CA-1／B-5・B-6／P-1〈要現物確認〉等）を並行し、後続のL2/L3拡張（AI-1〜6等・要検証）はF0のライセンス確定後に段階投入する。</a:t>
+            </a:r>
+          </a:p>
+        </p:txBody>
+      </p:sp>
+      <p:sp>
+        <p:nvSpPr>
+          <p:cNvPr id="44" name="Rectangle 43"/>
           <p:cNvSpPr/>
           <p:nvPr/>
         </p:nvSpPr>
         <p:spPr>
           <a:xfrm>
-            <a:off x="320040" y="3520440"/>
-            <a:ext cx="914400" cy="822960"/>
+            <a:off x="0" y="6583680"/>
+            <a:ext cx="12191695" cy="274320"/>
+          </a:xfrm>
+          <a:prstGeom prst="rect">
+            <a:avLst/>
+          </a:prstGeom>
+          <a:solidFill>
+            <a:srgbClr val="ECEEF0"/>
+          </a:solidFill>
+          <a:ln>
+            <a:noFill/>
+          </a:ln>
+          <a:effectLst/>
+        </p:spPr>
+        <p:style>
+          <a:lnRef idx="1">
+            <a:schemeClr val="accent1"/>
+          </a:lnRef>
+          <a:fillRef idx="3">
+            <a:schemeClr val="accent1"/>
+          </a:fillRef>
+          <a:effectRef idx="2">
+            <a:schemeClr val="accent1"/>
+          </a:effectRef>
+          <a:fontRef idx="minor">
+            <a:schemeClr val="lt1"/>
+          </a:fontRef>
+        </p:style>
+        <p:txBody>
+          <a:bodyPr rtlCol="0" anchor="ctr"/>
+          <a:lstStyle/>
+          <a:p>
+            <a:pPr algn="ctr"/>
+          </a:p>
+        </p:txBody>
+      </p:sp>
+      <p:sp>
+        <p:nvSpPr>
+          <p:cNvPr id="45" name="TextBox 44"/>
+          <p:cNvSpPr txBox="1"/>
+          <p:nvPr/>
+        </p:nvSpPr>
+        <p:spPr>
+          <a:xfrm>
+            <a:off x="274320" y="6592824"/>
+            <a:ext cx="8229600" cy="256032"/>
+          </a:xfrm>
+          <a:prstGeom prst="rect">
+            <a:avLst/>
+          </a:prstGeom>
+          <a:noFill/>
+        </p:spPr>
+        <p:txBody>
+          <a:bodyPr wrap="square" anchor="t" lIns="0" rIns="0" tIns="0" bIns="0">
+            <a:spAutoFit/>
+          </a:bodyPr>
+          <a:lstStyle/>
+          <a:p>
+            <a:pPr algn="l">
+              <a:lnSpc>
+                <a:spcPct val="115000"/>
+              </a:lnSpc>
+            </a:pPr>
+            <a:r>
+              <a:rPr sz="850" b="0" i="0">
+                <a:solidFill>
+                  <a:srgbClr val="666666"/>
+                </a:solidFill>
+                <a:latin typeface="Meiryo UI"/>
+                <a:ea typeface="Meiryo UI"/>
+              </a:rPr>
+              <a:t>社外秘（Confidential）— AKKODiSコンサルティング株式会社 マーケティング部内限り｜次ステップ（1/2）</a:t>
+            </a:r>
+          </a:p>
+        </p:txBody>
+      </p:sp>
+      <p:sp>
+        <p:nvSpPr>
+          <p:cNvPr id="46" name="TextBox 45"/>
+          <p:cNvSpPr txBox="1"/>
+          <p:nvPr/>
+        </p:nvSpPr>
+        <p:spPr>
+          <a:xfrm>
+            <a:off x="11521440" y="6592824"/>
+            <a:ext cx="548640" cy="256032"/>
+          </a:xfrm>
+          <a:prstGeom prst="rect">
+            <a:avLst/>
+          </a:prstGeom>
+          <a:noFill/>
+        </p:spPr>
+        <p:txBody>
+          <a:bodyPr wrap="square" anchor="t" lIns="0" rIns="0" tIns="0" bIns="0">
+            <a:spAutoFit/>
+          </a:bodyPr>
+          <a:lstStyle/>
+          <a:p>
+            <a:pPr algn="r">
+              <a:lnSpc>
+                <a:spcPct val="115000"/>
+              </a:lnSpc>
+            </a:pPr>
+            <a:r>
+              <a:rPr sz="850" b="0" i="0">
+                <a:solidFill>
+                  <a:srgbClr val="666666"/>
+                </a:solidFill>
+                <a:latin typeface="Meiryo UI"/>
+                <a:ea typeface="Meiryo UI"/>
+              </a:rPr>
+              <a:t>10</a:t>
+            </a:r>
+          </a:p>
+        </p:txBody>
+      </p:sp>
+    </p:spTree>
+  </p:cSld>
+  <p:clrMapOvr>
+    <a:masterClrMapping/>
+  </p:clrMapOvr>
+</p:sld>
+</file>
+
+<file path=ppt/slides/slide11.xml><?xml version="1.0" encoding="utf-8"?>
+<p:sld xmlns:a="http://schemas.openxmlformats.org/drawingml/2006/main" xmlns:p="http://schemas.openxmlformats.org/presentationml/2006/main" xmlns:r="http://schemas.openxmlformats.org/officeDocument/2006/relationships">
+  <p:cSld>
+    <p:spTree>
+      <p:nvGrpSpPr>
+        <p:cNvPr id="1" name=""/>
+        <p:cNvGrpSpPr/>
+        <p:nvPr/>
+      </p:nvGrpSpPr>
+      <p:grpSpPr/>
+      <p:sp>
+        <p:nvSpPr>
+          <p:cNvPr id="2" name="Rectangle 1"/>
+          <p:cNvSpPr/>
+          <p:nvPr/>
+        </p:nvSpPr>
+        <p:spPr>
+          <a:xfrm>
+            <a:off x="0" y="0"/>
+            <a:ext cx="12191695" cy="777240"/>
           </a:xfrm>
           <a:prstGeom prst="rect">
             <a:avLst/>
@@ -5032,14 +5375,182 @@
       </p:sp>
       <p:sp>
         <p:nvSpPr>
-          <p:cNvPr id="40" name="TextBox 39"/>
-          <p:cNvSpPr txBox="1"/>
-          <p:nvPr/>
-        </p:nvSpPr>
-        <p:spPr>
-          <a:xfrm>
-            <a:off x="320040" y="3520440"/>
-            <a:ext cx="914400" cy="822960"/>
+          <p:cNvPr id="3" name="Rectangle 2"/>
+          <p:cNvSpPr/>
+          <p:nvPr/>
+        </p:nvSpPr>
+        <p:spPr>
+          <a:xfrm>
+            <a:off x="0" y="777240"/>
+            <a:ext cx="12191695" cy="38100"/>
+          </a:xfrm>
+          <a:prstGeom prst="rect">
+            <a:avLst/>
+          </a:prstGeom>
+          <a:solidFill>
+            <a:srgbClr val="FFB81C"/>
+          </a:solidFill>
+          <a:ln>
+            <a:noFill/>
+          </a:ln>
+          <a:effectLst/>
+        </p:spPr>
+        <p:style>
+          <a:lnRef idx="1">
+            <a:schemeClr val="accent1"/>
+          </a:lnRef>
+          <a:fillRef idx="3">
+            <a:schemeClr val="accent1"/>
+          </a:fillRef>
+          <a:effectRef idx="2">
+            <a:schemeClr val="accent1"/>
+          </a:effectRef>
+          <a:fontRef idx="minor">
+            <a:schemeClr val="lt1"/>
+          </a:fontRef>
+        </p:style>
+        <p:txBody>
+          <a:bodyPr rtlCol="0" anchor="ctr"/>
+          <a:lstStyle/>
+          <a:p>
+            <a:pPr algn="ctr"/>
+          </a:p>
+        </p:txBody>
+      </p:sp>
+      <p:sp>
+        <p:nvSpPr>
+          <p:cNvPr id="4" name="TextBox 3"/>
+          <p:cNvSpPr txBox="1"/>
+          <p:nvPr/>
+        </p:nvSpPr>
+        <p:spPr>
+          <a:xfrm>
+            <a:off x="320040" y="91440"/>
+            <a:ext cx="9601200" cy="457200"/>
+          </a:xfrm>
+          <a:prstGeom prst="rect">
+            <a:avLst/>
+          </a:prstGeom>
+          <a:noFill/>
+        </p:spPr>
+        <p:txBody>
+          <a:bodyPr wrap="square" anchor="t" lIns="0" rIns="0" tIns="0" bIns="0">
+            <a:spAutoFit/>
+          </a:bodyPr>
+          <a:lstStyle/>
+          <a:p>
+            <a:pPr algn="l">
+              <a:lnSpc>
+                <a:spcPct val="115000"/>
+              </a:lnSpc>
+            </a:pPr>
+            <a:r>
+              <a:rPr sz="2200" b="1" i="0">
+                <a:solidFill>
+                  <a:srgbClr val="FFFFFF"/>
+                </a:solidFill>
+                <a:latin typeface="Meiryo UI"/>
+                <a:ea typeface="Meiryo UI"/>
+              </a:rPr>
+              <a:t>次ステップ（2/2）</a:t>
+            </a:r>
+          </a:p>
+        </p:txBody>
+      </p:sp>
+      <p:sp>
+        <p:nvSpPr>
+          <p:cNvPr id="5" name="TextBox 4"/>
+          <p:cNvSpPr txBox="1"/>
+          <p:nvPr/>
+        </p:nvSpPr>
+        <p:spPr>
+          <a:xfrm>
+            <a:off x="320040" y="502920"/>
+            <a:ext cx="9601200" cy="274320"/>
+          </a:xfrm>
+          <a:prstGeom prst="rect">
+            <a:avLst/>
+          </a:prstGeom>
+          <a:noFill/>
+        </p:spPr>
+        <p:txBody>
+          <a:bodyPr wrap="square" anchor="t" lIns="0" rIns="0" tIns="0" bIns="0">
+            <a:spAutoFit/>
+          </a:bodyPr>
+          <a:lstStyle/>
+          <a:p>
+            <a:pPr algn="l">
+              <a:lnSpc>
+                <a:spcPct val="115000"/>
+              </a:lnSpc>
+            </a:pPr>
+            <a:r>
+              <a:rPr sz="1100" b="0" i="0">
+                <a:solidFill>
+                  <a:srgbClr val="CFE3F0"/>
+                </a:solidFill>
+                <a:latin typeface="Meiryo UI"/>
+                <a:ea typeface="Meiryo UI"/>
+              </a:rPr>
+              <a:t>成功指標（KPI）／セキュリティ・権限ゲート／社長判断3点（docs/01 §6-2・docs/02 §6-2・§7）</a:t>
+            </a:r>
+          </a:p>
+        </p:txBody>
+      </p:sp>
+      <p:sp>
+        <p:nvSpPr>
+          <p:cNvPr id="6" name="Rectangle 5"/>
+          <p:cNvSpPr/>
+          <p:nvPr/>
+        </p:nvSpPr>
+        <p:spPr>
+          <a:xfrm>
+            <a:off x="9539935" y="164592"/>
+            <a:ext cx="2377440" cy="457200"/>
+          </a:xfrm>
+          <a:prstGeom prst="rect">
+            <a:avLst/>
+          </a:prstGeom>
+          <a:solidFill>
+            <a:srgbClr val="FFB81C"/>
+          </a:solidFill>
+          <a:ln>
+            <a:noFill/>
+          </a:ln>
+          <a:effectLst/>
+        </p:spPr>
+        <p:style>
+          <a:lnRef idx="1">
+            <a:schemeClr val="accent1"/>
+          </a:lnRef>
+          <a:fillRef idx="3">
+            <a:schemeClr val="accent1"/>
+          </a:fillRef>
+          <a:effectRef idx="2">
+            <a:schemeClr val="accent1"/>
+          </a:effectRef>
+          <a:fontRef idx="minor">
+            <a:schemeClr val="lt1"/>
+          </a:fontRef>
+        </p:style>
+        <p:txBody>
+          <a:bodyPr rtlCol="0" anchor="ctr"/>
+          <a:lstStyle/>
+          <a:p>
+            <a:pPr algn="ctr"/>
+          </a:p>
+        </p:txBody>
+      </p:sp>
+      <p:sp>
+        <p:nvSpPr>
+          <p:cNvPr id="7" name="TextBox 6"/>
+          <p:cNvSpPr txBox="1"/>
+          <p:nvPr/>
+        </p:nvSpPr>
+        <p:spPr>
+          <a:xfrm>
+            <a:off x="9539935" y="164592"/>
+            <a:ext cx="2377440" cy="457200"/>
           </a:xfrm>
           <a:prstGeom prst="rect">
             <a:avLst/>
@@ -5058,28 +5569,28 @@
               </a:lnSpc>
             </a:pPr>
             <a:r>
-              <a:rPr sz="900" b="1" i="0">
-                <a:solidFill>
-                  <a:srgbClr val="FFFFFF"/>
-                </a:solidFill>
-                <a:latin typeface="Meiryo UI"/>
-                <a:ea typeface="Meiryo UI"/>
-              </a:rPr>
-              <a:t>【要判断】</a:t>
-            </a:r>
-          </a:p>
-        </p:txBody>
-      </p:sp>
-      <p:sp>
-        <p:nvSpPr>
-          <p:cNvPr id="41" name="TextBox 40"/>
-          <p:cNvSpPr txBox="1"/>
-          <p:nvPr/>
-        </p:nvSpPr>
-        <p:spPr>
-          <a:xfrm>
-            <a:off x="1325880" y="3520440"/>
-            <a:ext cx="10332720" cy="219456"/>
+              <a:rPr sz="1200" b="1" i="0">
+                <a:solidFill>
+                  <a:srgbClr val="001F33"/>
+                </a:solidFill>
+                <a:latin typeface="Meiryo UI"/>
+                <a:ea typeface="Meiryo UI"/>
+              </a:rPr>
+              <a:t>次アクション</a:t>
+            </a:r>
+          </a:p>
+        </p:txBody>
+      </p:sp>
+      <p:sp>
+        <p:nvSpPr>
+          <p:cNvPr id="8" name="TextBox 7"/>
+          <p:cNvSpPr txBox="1"/>
+          <p:nvPr/>
+        </p:nvSpPr>
+        <p:spPr>
+          <a:xfrm>
+            <a:off x="320040" y="914400"/>
+            <a:ext cx="5577840" cy="237744"/>
           </a:xfrm>
           <a:prstGeom prst="rect">
             <a:avLst/>
@@ -5098,28 +5609,237 @@
               </a:lnSpc>
             </a:pPr>
             <a:r>
-              <a:rPr sz="1050" b="1" i="0">
+              <a:rPr sz="1300" b="1" i="0">
+                <a:solidFill>
+                  <a:srgbClr val="001F33"/>
+                </a:solidFill>
+                <a:latin typeface="Meiryo UI"/>
+                <a:ea typeface="Meiryo UI"/>
+              </a:rPr>
+              <a:t>成功指標（KPI）候補</a:t>
+            </a:r>
+          </a:p>
+        </p:txBody>
+      </p:sp>
+      <p:sp>
+        <p:nvSpPr>
+          <p:cNvPr id="9" name="TextBox 8"/>
+          <p:cNvSpPr txBox="1"/>
+          <p:nvPr/>
+        </p:nvSpPr>
+        <p:spPr>
+          <a:xfrm>
+            <a:off x="320040" y="1170432"/>
+            <a:ext cx="5577840" cy="201168"/>
+          </a:xfrm>
+          <a:prstGeom prst="rect">
+            <a:avLst/>
+          </a:prstGeom>
+          <a:noFill/>
+        </p:spPr>
+        <p:txBody>
+          <a:bodyPr wrap="square" anchor="t" lIns="0" rIns="0" tIns="0" bIns="0">
+            <a:spAutoFit/>
+          </a:bodyPr>
+          <a:lstStyle/>
+          <a:p>
+            <a:pPr algn="l">
+              <a:lnSpc>
+                <a:spcPct val="115000"/>
+              </a:lnSpc>
+            </a:pPr>
+            <a:r>
+              <a:rPr sz="900" b="0" i="1">
+                <a:solidFill>
+                  <a:srgbClr val="666666"/>
+                </a:solidFill>
+                <a:latin typeface="Meiryo UI"/>
+                <a:ea typeface="Meiryo UI"/>
+              </a:rPr>
+              <a:t>測定方針：現状値取得 → 目標設定 → MVP後測定　（docs/01 §6-2）</a:t>
+            </a:r>
+          </a:p>
+        </p:txBody>
+      </p:sp>
+      <p:sp>
+        <p:nvSpPr>
+          <p:cNvPr id="10" name="TextBox 9"/>
+          <p:cNvSpPr txBox="1"/>
+          <p:nvPr/>
+        </p:nvSpPr>
+        <p:spPr>
+          <a:xfrm>
+            <a:off x="320040" y="1444752"/>
+            <a:ext cx="5577840" cy="1737360"/>
+          </a:xfrm>
+          <a:prstGeom prst="rect">
+            <a:avLst/>
+          </a:prstGeom>
+          <a:noFill/>
+        </p:spPr>
+        <p:txBody>
+          <a:bodyPr wrap="square" lIns="0" rIns="0" tIns="0" bIns="0">
+            <a:spAutoFit/>
+          </a:bodyPr>
+          <a:lstStyle/>
+          <a:p>
+            <a:pPr>
+              <a:lnSpc>
+                <a:spcPct val="112000"/>
+              </a:lnSpc>
+              <a:spcAft>
+                <a:spcPts val="800"/>
+              </a:spcAft>
+            </a:pPr>
+            <a:r>
+              <a:rPr sz="960" b="0" i="0">
                 <a:solidFill>
                   <a:srgbClr val="333333"/>
                 </a:solidFill>
                 <a:latin typeface="Meiryo UI"/>
                 <a:ea typeface="Meiryo UI"/>
               </a:rPr>
-              <a:t>MVPをL1の4点に絞って先行してよいか</a:t>
-            </a:r>
-          </a:p>
-        </p:txBody>
-      </p:sp>
-      <p:sp>
-        <p:nvSpPr>
-          <p:cNvPr id="42" name="TextBox 41"/>
-          <p:cNvSpPr txBox="1"/>
-          <p:nvPr/>
-        </p:nvSpPr>
-        <p:spPr>
-          <a:xfrm>
-            <a:off x="1325880" y="3749040"/>
-            <a:ext cx="10332720" cy="548640"/>
+              <a:t>・ 検索成功率・ゼロ件率（G-2の効果測定）</a:t>
+            </a:r>
+          </a:p>
+          <a:p>
+            <a:pPr>
+              <a:lnSpc>
+                <a:spcPct val="112000"/>
+              </a:lnSpc>
+              <a:spcAft>
+                <a:spcPts val="800"/>
+              </a:spcAft>
+            </a:pPr>
+            <a:r>
+              <a:rPr sz="960" b="0" i="0">
+                <a:solidFill>
+                  <a:srgbClr val="333333"/>
+                </a:solidFill>
+                <a:latin typeface="Meiryo UI"/>
+                <a:ea typeface="Meiryo UI"/>
+              </a:rPr>
+              <a:t>・ 目的資料までのクリック数・所要時間（B-1／到達効率）</a:t>
+            </a:r>
+          </a:p>
+          <a:p>
+            <a:pPr>
+              <a:lnSpc>
+                <a:spcPct val="112000"/>
+              </a:lnSpc>
+              <a:spcAft>
+                <a:spcPts val="800"/>
+              </a:spcAft>
+            </a:pPr>
+            <a:r>
+              <a:rPr sz="960" b="0" i="0">
+                <a:solidFill>
+                  <a:srgbClr val="333333"/>
+                </a:solidFill>
+                <a:latin typeface="Meiryo UI"/>
+                <a:ea typeface="Meiryo UI"/>
+              </a:rPr>
+              <a:t>・ 「資料が見つからない」問い合わせ件数（CA-1／メール検索代替の指標）</a:t>
+            </a:r>
+          </a:p>
+          <a:p>
+            <a:pPr>
+              <a:lnSpc>
+                <a:spcPct val="112000"/>
+              </a:lnSpc>
+              <a:spcAft>
+                <a:spcPts val="800"/>
+              </a:spcAft>
+            </a:pPr>
+            <a:r>
+              <a:rPr sz="960" b="0" i="0">
+                <a:solidFill>
+                  <a:srgbClr val="333333"/>
+                </a:solidFill>
+                <a:latin typeface="Meiryo UI"/>
+                <a:ea typeface="Meiryo UI"/>
+              </a:rPr>
+              <a:t>・ 候補者資料の直リンク利用数（CA-1のクイックウィン効果測定）</a:t>
+            </a:r>
+          </a:p>
+          <a:p>
+            <a:pPr>
+              <a:lnSpc>
+                <a:spcPct val="112000"/>
+              </a:lnSpc>
+              <a:spcAft>
+                <a:spcPts val="800"/>
+              </a:spcAft>
+            </a:pPr>
+            <a:r>
+              <a:rPr sz="960" b="0" i="0">
+                <a:solidFill>
+                  <a:srgbClr val="333333"/>
+                </a:solidFill>
+                <a:latin typeface="Meiryo UI"/>
+                <a:ea typeface="Meiryo UI"/>
+              </a:rPr>
+              <a:t>・ モバイル到達率（T-1／B-7のモバイル対応効果測定）</a:t>
+            </a:r>
+          </a:p>
+        </p:txBody>
+      </p:sp>
+      <p:sp>
+        <p:nvSpPr>
+          <p:cNvPr id="11" name="Rectangle 10"/>
+          <p:cNvSpPr/>
+          <p:nvPr/>
+        </p:nvSpPr>
+        <p:spPr>
+          <a:xfrm>
+            <a:off x="320040" y="3337560"/>
+            <a:ext cx="5577840" cy="777240"/>
+          </a:xfrm>
+          <a:prstGeom prst="rect">
+            <a:avLst/>
+          </a:prstGeom>
+          <a:solidFill>
+            <a:srgbClr val="F4F5F6"/>
+          </a:solidFill>
+          <a:ln w="9525">
+            <a:solidFill>
+              <a:srgbClr val="C7CCD1"/>
+            </a:solidFill>
+          </a:ln>
+          <a:effectLst/>
+        </p:spPr>
+        <p:style>
+          <a:lnRef idx="1">
+            <a:schemeClr val="accent1"/>
+          </a:lnRef>
+          <a:fillRef idx="3">
+            <a:schemeClr val="accent1"/>
+          </a:fillRef>
+          <a:effectRef idx="2">
+            <a:schemeClr val="accent1"/>
+          </a:effectRef>
+          <a:fontRef idx="minor">
+            <a:schemeClr val="lt1"/>
+          </a:fontRef>
+        </p:style>
+        <p:txBody>
+          <a:bodyPr rtlCol="0" anchor="ctr"/>
+          <a:lstStyle/>
+          <a:p>
+            <a:pPr algn="ctr"/>
+          </a:p>
+        </p:txBody>
+      </p:sp>
+      <p:sp>
+        <p:nvSpPr>
+          <p:cNvPr id="12" name="TextBox 11"/>
+          <p:cNvSpPr txBox="1"/>
+          <p:nvPr/>
+        </p:nvSpPr>
+        <p:spPr>
+          <a:xfrm>
+            <a:off x="429768" y="3410712"/>
+            <a:ext cx="5358384" cy="640080"/>
           </a:xfrm>
           <a:prstGeom prst="rect">
             <a:avLst/>
@@ -5134,32 +5854,282 @@
           <a:p>
             <a:pPr algn="l">
               <a:lnSpc>
-                <a:spcPct val="110000"/>
-              </a:lnSpc>
-            </a:pPr>
-            <a:r>
-              <a:rPr sz="880" b="0" i="0">
-                <a:solidFill>
-                  <a:srgbClr val="666666"/>
-                </a:solidFill>
-                <a:latin typeface="Meiryo UI"/>
-                <a:ea typeface="Meiryo UI"/>
-              </a:rPr>
-              <a:t>直リンク化(CA-1)＋ブランドライブラリ再構成(B-1/B-2)＋Microsoft Search(G-2)＋メタデータ設計の4点を先行する案。推奨：絞る</a:t>
-            </a:r>
-          </a:p>
-        </p:txBody>
-      </p:sp>
-      <p:sp>
-        <p:nvSpPr>
-          <p:cNvPr id="43" name="Rectangle 42"/>
+                <a:spcPct val="115000"/>
+              </a:lnSpc>
+            </a:pPr>
+            <a:r>
+              <a:rPr sz="860" b="0" i="0">
+                <a:solidFill>
+                  <a:srgbClr val="333333"/>
+                </a:solidFill>
+                <a:latin typeface="Meiryo UI"/>
+                <a:ea typeface="Meiryo UI"/>
+              </a:rPr>
+              <a:t>MVP稼働後、上記5指標について現状値を取得し目標値を設定、MVP実装後に再測定して効果を検証する（本資料はKPI候補の提示であり、目標値の確定は次フェーズで行う）。</a:t>
+            </a:r>
+          </a:p>
+        </p:txBody>
+      </p:sp>
+      <p:sp>
+        <p:nvSpPr>
+          <p:cNvPr id="13" name="TextBox 12"/>
+          <p:cNvSpPr txBox="1"/>
+          <p:nvPr/>
+        </p:nvSpPr>
+        <p:spPr>
+          <a:xfrm>
+            <a:off x="6126480" y="914400"/>
+            <a:ext cx="5760720" cy="237744"/>
+          </a:xfrm>
+          <a:prstGeom prst="rect">
+            <a:avLst/>
+          </a:prstGeom>
+          <a:noFill/>
+        </p:spPr>
+        <p:txBody>
+          <a:bodyPr wrap="square" anchor="t" lIns="0" rIns="0" tIns="0" bIns="0">
+            <a:spAutoFit/>
+          </a:bodyPr>
+          <a:lstStyle/>
+          <a:p>
+            <a:pPr algn="l">
+              <a:lnSpc>
+                <a:spcPct val="115000"/>
+              </a:lnSpc>
+            </a:pPr>
+            <a:r>
+              <a:rPr sz="1300" b="1" i="0">
+                <a:solidFill>
+                  <a:srgbClr val="001F33"/>
+                </a:solidFill>
+                <a:latin typeface="Meiryo UI"/>
+                <a:ea typeface="Meiryo UI"/>
+              </a:rPr>
+              <a:t>セキュリティ／権限ゲート（F0・F2 必須）</a:t>
+            </a:r>
+          </a:p>
+        </p:txBody>
+      </p:sp>
+      <p:sp>
+        <p:nvSpPr>
+          <p:cNvPr id="14" name="Rectangle 13"/>
           <p:cNvSpPr/>
           <p:nvPr/>
         </p:nvSpPr>
         <p:spPr>
           <a:xfrm>
-            <a:off x="320040" y="4453128"/>
-            <a:ext cx="914400" cy="822960"/>
+            <a:off x="6126480" y="1188720"/>
+            <a:ext cx="5760720" cy="1417320"/>
+          </a:xfrm>
+          <a:prstGeom prst="rect">
+            <a:avLst/>
+          </a:prstGeom>
+          <a:solidFill>
+            <a:srgbClr val="FBF3E8"/>
+          </a:solidFill>
+          <a:ln w="12700">
+            <a:solidFill>
+              <a:srgbClr val="B5762A"/>
+            </a:solidFill>
+            <a:prstDash val="dash"/>
+          </a:ln>
+          <a:effectLst/>
+        </p:spPr>
+        <p:style>
+          <a:lnRef idx="1">
+            <a:schemeClr val="accent1"/>
+          </a:lnRef>
+          <a:fillRef idx="3">
+            <a:schemeClr val="accent1"/>
+          </a:fillRef>
+          <a:effectRef idx="2">
+            <a:schemeClr val="accent1"/>
+          </a:effectRef>
+          <a:fontRef idx="minor">
+            <a:schemeClr val="lt1"/>
+          </a:fontRef>
+        </p:style>
+        <p:txBody>
+          <a:bodyPr rtlCol="0" anchor="ctr"/>
+          <a:lstStyle/>
+          <a:p>
+            <a:pPr algn="ctr"/>
+          </a:p>
+        </p:txBody>
+      </p:sp>
+      <p:sp>
+        <p:nvSpPr>
+          <p:cNvPr id="15" name="TextBox 14"/>
+          <p:cNvSpPr txBox="1"/>
+          <p:nvPr/>
+        </p:nvSpPr>
+        <p:spPr>
+          <a:xfrm>
+            <a:off x="6236208" y="1280160"/>
+            <a:ext cx="5541264" cy="1234440"/>
+          </a:xfrm>
+          <a:prstGeom prst="rect">
+            <a:avLst/>
+          </a:prstGeom>
+          <a:noFill/>
+        </p:spPr>
+        <p:txBody>
+          <a:bodyPr wrap="square" lIns="0" rIns="0" tIns="0" bIns="0">
+            <a:spAutoFit/>
+          </a:bodyPr>
+          <a:lstStyle/>
+          <a:p>
+            <a:pPr>
+              <a:lnSpc>
+                <a:spcPct val="112000"/>
+              </a:lnSpc>
+              <a:spcAft>
+                <a:spcPts val="500"/>
+              </a:spcAft>
+            </a:pPr>
+            <a:r>
+              <a:rPr sz="860" b="0" i="0">
+                <a:solidFill>
+                  <a:srgbClr val="333333"/>
+                </a:solidFill>
+                <a:latin typeface="Meiryo UI"/>
+                <a:ea typeface="Meiryo UI"/>
+              </a:rPr>
+              <a:t>・ 外部共有方針（クライアント配布PDF・会社案内等）の確定 — コミュニケーションサイトは既定オフを推奨（docs/02 §7）</a:t>
+            </a:r>
+          </a:p>
+          <a:p>
+            <a:pPr>
+              <a:lnSpc>
+                <a:spcPct val="112000"/>
+              </a:lnSpc>
+              <a:spcAft>
+                <a:spcPts val="500"/>
+              </a:spcAft>
+            </a:pPr>
+            <a:r>
+              <a:rPr sz="860" b="0" i="0">
+                <a:solidFill>
+                  <a:srgbClr val="333333"/>
+                </a:solidFill>
+                <a:latin typeface="Meiryo UI"/>
+                <a:ea typeface="Meiryo UI"/>
+              </a:rPr>
+              <a:t>・ 機微／社外秘資料のライブラリ・権限分離 — ブランドライブラリ「注意事項」記載の営業秘密情報を含むため必須</a:t>
+            </a:r>
+          </a:p>
+          <a:p>
+            <a:pPr>
+              <a:lnSpc>
+                <a:spcPct val="112000"/>
+              </a:lnSpc>
+              <a:spcAft>
+                <a:spcPts val="500"/>
+              </a:spcAft>
+            </a:pPr>
+            <a:r>
+              <a:rPr sz="860" b="0" i="0">
+                <a:solidFill>
+                  <a:srgbClr val="333333"/>
+                </a:solidFill>
+                <a:latin typeface="Meiryo UI"/>
+                <a:ea typeface="Meiryo UI"/>
+              </a:rPr>
+              <a:t>・ AI検索／ナレッジ源に含める対象範囲の明示 — 権限設計（F2）がAI機能の前提。誤設計はAIの情報漏れに直結（docs/02 §7）</a:t>
+            </a:r>
+          </a:p>
+        </p:txBody>
+      </p:sp>
+      <p:sp>
+        <p:nvSpPr>
+          <p:cNvPr id="16" name="TextBox 15"/>
+          <p:cNvSpPr txBox="1"/>
+          <p:nvPr/>
+        </p:nvSpPr>
+        <p:spPr>
+          <a:xfrm>
+            <a:off x="6126480" y="2697480"/>
+            <a:ext cx="5760720" cy="274320"/>
+          </a:xfrm>
+          <a:prstGeom prst="rect">
+            <a:avLst/>
+          </a:prstGeom>
+          <a:noFill/>
+        </p:spPr>
+        <p:txBody>
+          <a:bodyPr wrap="square" anchor="t" lIns="0" rIns="0" tIns="0" bIns="0">
+            <a:spAutoFit/>
+          </a:bodyPr>
+          <a:lstStyle/>
+          <a:p>
+            <a:pPr algn="l">
+              <a:lnSpc>
+                <a:spcPct val="115000"/>
+              </a:lnSpc>
+            </a:pPr>
+            <a:r>
+              <a:rPr sz="880" b="1" i="0">
+                <a:solidFill>
+                  <a:srgbClr val="8A5518"/>
+                </a:solidFill>
+                <a:latin typeface="Meiryo UI"/>
+                <a:ea typeface="Meiryo UI"/>
+              </a:rPr>
+              <a:t>→ F0（棚卸し）・F2（権限設計）の必須ゲート。可否・範囲は社長判断事項</a:t>
+            </a:r>
+          </a:p>
+        </p:txBody>
+      </p:sp>
+      <p:sp>
+        <p:nvSpPr>
+          <p:cNvPr id="17" name="TextBox 16"/>
+          <p:cNvSpPr txBox="1"/>
+          <p:nvPr/>
+        </p:nvSpPr>
+        <p:spPr>
+          <a:xfrm>
+            <a:off x="6126480" y="3063240"/>
+            <a:ext cx="5760720" cy="237744"/>
+          </a:xfrm>
+          <a:prstGeom prst="rect">
+            <a:avLst/>
+          </a:prstGeom>
+          <a:noFill/>
+        </p:spPr>
+        <p:txBody>
+          <a:bodyPr wrap="square" anchor="t" lIns="0" rIns="0" tIns="0" bIns="0">
+            <a:spAutoFit/>
+          </a:bodyPr>
+          <a:lstStyle/>
+          <a:p>
+            <a:pPr algn="l">
+              <a:lnSpc>
+                <a:spcPct val="115000"/>
+              </a:lnSpc>
+            </a:pPr>
+            <a:r>
+              <a:rPr sz="1300" b="1" i="0">
+                <a:solidFill>
+                  <a:srgbClr val="001F33"/>
+                </a:solidFill>
+                <a:latin typeface="Meiryo UI"/>
+                <a:ea typeface="Meiryo UI"/>
+              </a:rPr>
+              <a:t>社長にご判断・ご確認いただきたい点（3点）</a:t>
+            </a:r>
+          </a:p>
+        </p:txBody>
+      </p:sp>
+      <p:sp>
+        <p:nvSpPr>
+          <p:cNvPr id="18" name="Rectangle 17"/>
+          <p:cNvSpPr/>
+          <p:nvPr/>
+        </p:nvSpPr>
+        <p:spPr>
+          <a:xfrm>
+            <a:off x="6126480" y="3337560"/>
+            <a:ext cx="914400" cy="685800"/>
           </a:xfrm>
           <a:prstGeom prst="rect">
             <a:avLst/>
@@ -5196,14 +6166,14 @@
       </p:sp>
       <p:sp>
         <p:nvSpPr>
-          <p:cNvPr id="44" name="TextBox 43"/>
-          <p:cNvSpPr txBox="1"/>
-          <p:nvPr/>
-        </p:nvSpPr>
-        <p:spPr>
-          <a:xfrm>
-            <a:off x="320040" y="4453128"/>
-            <a:ext cx="914400" cy="822960"/>
+          <p:cNvPr id="19" name="TextBox 18"/>
+          <p:cNvSpPr txBox="1"/>
+          <p:nvPr/>
+        </p:nvSpPr>
+        <p:spPr>
+          <a:xfrm>
+            <a:off x="6126480" y="3337560"/>
+            <a:ext cx="914400" cy="685800"/>
           </a:xfrm>
           <a:prstGeom prst="rect">
             <a:avLst/>
@@ -5222,28 +6192,28 @@
               </a:lnSpc>
             </a:pPr>
             <a:r>
-              <a:rPr sz="900" b="1" i="0">
+              <a:rPr sz="830" b="1" i="0">
                 <a:solidFill>
                   <a:srgbClr val="FFFFFF"/>
                 </a:solidFill>
                 <a:latin typeface="Meiryo UI"/>
                 <a:ea typeface="Meiryo UI"/>
               </a:rPr>
-              <a:t>【要確認】</a:t>
-            </a:r>
-          </a:p>
-        </p:txBody>
-      </p:sp>
-      <p:sp>
-        <p:nvSpPr>
-          <p:cNvPr id="45" name="TextBox 44"/>
-          <p:cNvSpPr txBox="1"/>
-          <p:nvPr/>
-        </p:nvSpPr>
-        <p:spPr>
-          <a:xfrm>
-            <a:off x="1325880" y="4453128"/>
-            <a:ext cx="10332720" cy="219456"/>
+              <a:t>【要判断】</a:t>
+            </a:r>
+          </a:p>
+        </p:txBody>
+      </p:sp>
+      <p:sp>
+        <p:nvSpPr>
+          <p:cNvPr id="20" name="TextBox 19"/>
+          <p:cNvSpPr txBox="1"/>
+          <p:nvPr/>
+        </p:nvSpPr>
+        <p:spPr>
+          <a:xfrm>
+            <a:off x="7132320" y="3337560"/>
+            <a:ext cx="4754880" cy="201168"/>
           </a:xfrm>
           <a:prstGeom prst="rect">
             <a:avLst/>
@@ -5258,32 +6228,32 @@
           <a:p>
             <a:pPr algn="l">
               <a:lnSpc>
-                <a:spcPct val="115000"/>
-              </a:lnSpc>
-            </a:pPr>
-            <a:r>
-              <a:rPr sz="1050" b="1" i="0">
+                <a:spcPct val="100000"/>
+              </a:lnSpc>
+            </a:pPr>
+            <a:r>
+              <a:rPr sz="880" b="1" i="0">
                 <a:solidFill>
                   <a:srgbClr val="333333"/>
                 </a:solidFill>
                 <a:latin typeface="Meiryo UI"/>
                 <a:ea typeface="Meiryo UI"/>
               </a:rPr>
-              <a:t>テナントのライセンス実態の確認（IT窓口の特定）</a:t>
-            </a:r>
-          </a:p>
-        </p:txBody>
-      </p:sp>
-      <p:sp>
-        <p:nvSpPr>
-          <p:cNvPr id="46" name="TextBox 45"/>
-          <p:cNvSpPr txBox="1"/>
-          <p:nvPr/>
-        </p:nvSpPr>
-        <p:spPr>
-          <a:xfrm>
-            <a:off x="1325880" y="4681728"/>
-            <a:ext cx="10332720" cy="548640"/>
+              <a:t>MVPをL1の4点に絞って先行してよいか</a:t>
+            </a:r>
+          </a:p>
+        </p:txBody>
+      </p:sp>
+      <p:sp>
+        <p:nvSpPr>
+          <p:cNvPr id="21" name="TextBox 20"/>
+          <p:cNvSpPr txBox="1"/>
+          <p:nvPr/>
+        </p:nvSpPr>
+        <p:spPr>
+          <a:xfrm>
+            <a:off x="7132320" y="3538728"/>
+            <a:ext cx="4754880" cy="457200"/>
           </a:xfrm>
           <a:prstGeom prst="rect">
             <a:avLst/>
@@ -5298,32 +6268,32 @@
           <a:p>
             <a:pPr algn="l">
               <a:lnSpc>
-                <a:spcPct val="110000"/>
-              </a:lnSpc>
-            </a:pPr>
-            <a:r>
-              <a:rPr sz="880" b="0" i="0">
+                <a:spcPct val="105000"/>
+              </a:lnSpc>
+            </a:pPr>
+            <a:r>
+              <a:rPr sz="760" b="0" i="0">
                 <a:solidFill>
                   <a:srgbClr val="666666"/>
                 </a:solidFill>
                 <a:latin typeface="Meiryo UI"/>
                 <a:ea typeface="Meiryo UI"/>
               </a:rPr>
-              <a:t>M365 Copilot／Copilot Studio／SharePoint Premium／Power Platformプレミアムの保有・付与範囲。未確定だとAI6機能の可否が決まらない（最大のブロッカー）</a:t>
-            </a:r>
-          </a:p>
-        </p:txBody>
-      </p:sp>
-      <p:sp>
-        <p:nvSpPr>
-          <p:cNvPr id="47" name="Rectangle 46"/>
+              <a:t>直リンク化(CA-1)＋ブランドライブラリ再構成(B-1/B-2)＋Microsoft Search(G-2)＋メタデータ設計の4点を先行する案。推奨：絞る</a:t>
+            </a:r>
+          </a:p>
+        </p:txBody>
+      </p:sp>
+      <p:sp>
+        <p:nvSpPr>
+          <p:cNvPr id="22" name="Rectangle 21"/>
           <p:cNvSpPr/>
           <p:nvPr/>
         </p:nvSpPr>
         <p:spPr>
           <a:xfrm>
-            <a:off x="320040" y="5385816"/>
-            <a:ext cx="914400" cy="365760"/>
+            <a:off x="6126480" y="4096512"/>
+            <a:ext cx="914400" cy="685800"/>
           </a:xfrm>
           <a:prstGeom prst="rect">
             <a:avLst/>
@@ -5360,14 +6330,14 @@
       </p:sp>
       <p:sp>
         <p:nvSpPr>
-          <p:cNvPr id="48" name="TextBox 47"/>
-          <p:cNvSpPr txBox="1"/>
-          <p:nvPr/>
-        </p:nvSpPr>
-        <p:spPr>
-          <a:xfrm>
-            <a:off x="320040" y="5385816"/>
-            <a:ext cx="914400" cy="365760"/>
+          <p:cNvPr id="23" name="TextBox 22"/>
+          <p:cNvSpPr txBox="1"/>
+          <p:nvPr/>
+        </p:nvSpPr>
+        <p:spPr>
+          <a:xfrm>
+            <a:off x="6126480" y="4096512"/>
+            <a:ext cx="914400" cy="685800"/>
           </a:xfrm>
           <a:prstGeom prst="rect">
             <a:avLst/>
@@ -5386,13 +6356,177 @@
               </a:lnSpc>
             </a:pPr>
             <a:r>
-              <a:rPr sz="900" b="1" i="0">
+              <a:rPr sz="830" b="1" i="0">
                 <a:solidFill>
                   <a:srgbClr val="FFFFFF"/>
                 </a:solidFill>
                 <a:latin typeface="Meiryo UI"/>
                 <a:ea typeface="Meiryo UI"/>
               </a:rPr>
+              <a:t>【要確認】</a:t>
+            </a:r>
+          </a:p>
+        </p:txBody>
+      </p:sp>
+      <p:sp>
+        <p:nvSpPr>
+          <p:cNvPr id="24" name="TextBox 23"/>
+          <p:cNvSpPr txBox="1"/>
+          <p:nvPr/>
+        </p:nvSpPr>
+        <p:spPr>
+          <a:xfrm>
+            <a:off x="7132320" y="4096512"/>
+            <a:ext cx="4754880" cy="201168"/>
+          </a:xfrm>
+          <a:prstGeom prst="rect">
+            <a:avLst/>
+          </a:prstGeom>
+          <a:noFill/>
+        </p:spPr>
+        <p:txBody>
+          <a:bodyPr wrap="square" anchor="t" lIns="0" rIns="0" tIns="0" bIns="0">
+            <a:spAutoFit/>
+          </a:bodyPr>
+          <a:lstStyle/>
+          <a:p>
+            <a:pPr algn="l">
+              <a:lnSpc>
+                <a:spcPct val="100000"/>
+              </a:lnSpc>
+            </a:pPr>
+            <a:r>
+              <a:rPr sz="880" b="1" i="0">
+                <a:solidFill>
+                  <a:srgbClr val="333333"/>
+                </a:solidFill>
+                <a:latin typeface="Meiryo UI"/>
+                <a:ea typeface="Meiryo UI"/>
+              </a:rPr>
+              <a:t>テナントのライセンス実態の確認（IT窓口の特定）</a:t>
+            </a:r>
+          </a:p>
+        </p:txBody>
+      </p:sp>
+      <p:sp>
+        <p:nvSpPr>
+          <p:cNvPr id="25" name="TextBox 24"/>
+          <p:cNvSpPr txBox="1"/>
+          <p:nvPr/>
+        </p:nvSpPr>
+        <p:spPr>
+          <a:xfrm>
+            <a:off x="7132320" y="4297680"/>
+            <a:ext cx="4754880" cy="457200"/>
+          </a:xfrm>
+          <a:prstGeom prst="rect">
+            <a:avLst/>
+          </a:prstGeom>
+          <a:noFill/>
+        </p:spPr>
+        <p:txBody>
+          <a:bodyPr wrap="square" anchor="t" lIns="0" rIns="0" tIns="0" bIns="0">
+            <a:spAutoFit/>
+          </a:bodyPr>
+          <a:lstStyle/>
+          <a:p>
+            <a:pPr algn="l">
+              <a:lnSpc>
+                <a:spcPct val="105000"/>
+              </a:lnSpc>
+            </a:pPr>
+            <a:r>
+              <a:rPr sz="760" b="0" i="0">
+                <a:solidFill>
+                  <a:srgbClr val="666666"/>
+                </a:solidFill>
+                <a:latin typeface="Meiryo UI"/>
+                <a:ea typeface="Meiryo UI"/>
+              </a:rPr>
+              <a:t>M365 Copilot／Copilot Studio／SharePoint Premium／Power Platformプレミアムの保有・付与範囲。未確定だとAI6機能の可否が決まらない（最大のブロッカー）</a:t>
+            </a:r>
+          </a:p>
+        </p:txBody>
+      </p:sp>
+      <p:sp>
+        <p:nvSpPr>
+          <p:cNvPr id="26" name="Rectangle 25"/>
+          <p:cNvSpPr/>
+          <p:nvPr/>
+        </p:nvSpPr>
+        <p:spPr>
+          <a:xfrm>
+            <a:off x="6126480" y="4855464"/>
+            <a:ext cx="914400" cy="292608"/>
+          </a:xfrm>
+          <a:prstGeom prst="rect">
+            <a:avLst/>
+          </a:prstGeom>
+          <a:solidFill>
+            <a:srgbClr val="001F33"/>
+          </a:solidFill>
+          <a:ln>
+            <a:noFill/>
+          </a:ln>
+          <a:effectLst/>
+        </p:spPr>
+        <p:style>
+          <a:lnRef idx="1">
+            <a:schemeClr val="accent1"/>
+          </a:lnRef>
+          <a:fillRef idx="3">
+            <a:schemeClr val="accent1"/>
+          </a:fillRef>
+          <a:effectRef idx="2">
+            <a:schemeClr val="accent1"/>
+          </a:effectRef>
+          <a:fontRef idx="minor">
+            <a:schemeClr val="lt1"/>
+          </a:fontRef>
+        </p:style>
+        <p:txBody>
+          <a:bodyPr rtlCol="0" anchor="ctr"/>
+          <a:lstStyle/>
+          <a:p>
+            <a:pPr algn="ctr"/>
+          </a:p>
+        </p:txBody>
+      </p:sp>
+      <p:sp>
+        <p:nvSpPr>
+          <p:cNvPr id="27" name="TextBox 26"/>
+          <p:cNvSpPr txBox="1"/>
+          <p:nvPr/>
+        </p:nvSpPr>
+        <p:spPr>
+          <a:xfrm>
+            <a:off x="6126480" y="4855464"/>
+            <a:ext cx="914400" cy="292608"/>
+          </a:xfrm>
+          <a:prstGeom prst="rect">
+            <a:avLst/>
+          </a:prstGeom>
+          <a:noFill/>
+        </p:spPr>
+        <p:txBody>
+          <a:bodyPr wrap="square" anchor="ctr" lIns="0" rIns="0" tIns="0" bIns="0">
+            <a:spAutoFit/>
+          </a:bodyPr>
+          <a:lstStyle/>
+          <a:p>
+            <a:pPr algn="ctr">
+              <a:lnSpc>
+                <a:spcPct val="115000"/>
+              </a:lnSpc>
+            </a:pPr>
+            <a:r>
+              <a:rPr sz="830" b="1" i="0">
+                <a:solidFill>
+                  <a:srgbClr val="FFFFFF"/>
+                </a:solidFill>
+                <a:latin typeface="Meiryo UI"/>
+                <a:ea typeface="Meiryo UI"/>
+              </a:rPr>
               <a:t>【要判断】</a:t>
             </a:r>
           </a:p>
@@ -5400,14 +6534,14 @@
       </p:sp>
       <p:sp>
         <p:nvSpPr>
-          <p:cNvPr id="49" name="TextBox 48"/>
-          <p:cNvSpPr txBox="1"/>
-          <p:nvPr/>
-        </p:nvSpPr>
-        <p:spPr>
-          <a:xfrm>
-            <a:off x="1325880" y="5385816"/>
-            <a:ext cx="10332720" cy="219456"/>
+          <p:cNvPr id="28" name="TextBox 27"/>
+          <p:cNvSpPr txBox="1"/>
+          <p:nvPr/>
+        </p:nvSpPr>
+        <p:spPr>
+          <a:xfrm>
+            <a:off x="7132320" y="4855464"/>
+            <a:ext cx="4754880" cy="201168"/>
           </a:xfrm>
           <a:prstGeom prst="rect">
             <a:avLst/>
@@ -5422,11 +6556,11 @@
           <a:p>
             <a:pPr algn="l">
               <a:lnSpc>
-                <a:spcPct val="115000"/>
-              </a:lnSpc>
-            </a:pPr>
-            <a:r>
-              <a:rPr sz="1050" b="1" i="0">
+                <a:spcPct val="100000"/>
+              </a:lnSpc>
+            </a:pPr>
+            <a:r>
+              <a:rPr sz="880" b="1" i="0">
                 <a:solidFill>
                   <a:srgbClr val="333333"/>
                 </a:solidFill>
@@ -5440,7 +6574,7 @@
       </p:sp>
       <p:sp>
         <p:nvSpPr>
-          <p:cNvPr id="50" name="Rectangle 49"/>
+          <p:cNvPr id="29" name="Rectangle 28"/>
           <p:cNvSpPr/>
           <p:nvPr/>
         </p:nvSpPr>
@@ -5484,7 +6618,7 @@
       </p:sp>
       <p:sp>
         <p:nvSpPr>
-          <p:cNvPr id="51" name="TextBox 50"/>
+          <p:cNvPr id="30" name="TextBox 29"/>
           <p:cNvSpPr txBox="1"/>
           <p:nvPr/>
         </p:nvSpPr>
@@ -5517,14 +6651,14 @@
                 <a:latin typeface="Meiryo UI"/>
                 <a:ea typeface="Meiryo UI"/>
               </a:rPr>
-              <a:t>社外秘（Confidential）— AKKODiSコンサルティング株式会社 マーケティング部内限り｜次ステップ</a:t>
-            </a:r>
-          </a:p>
-        </p:txBody>
-      </p:sp>
-      <p:sp>
-        <p:nvSpPr>
-          <p:cNvPr id="52" name="TextBox 51"/>
+              <a:t>社外秘（Confidential）— AKKODiSコンサルティング株式会社 マーケティング部内限り｜次ステップ（2/2）</a:t>
+            </a:r>
+          </a:p>
+        </p:txBody>
+      </p:sp>
+      <p:sp>
+        <p:nvSpPr>
+          <p:cNvPr id="31" name="TextBox 30"/>
           <p:cNvSpPr txBox="1"/>
           <p:nvPr/>
         </p:nvSpPr>
@@ -5557,7 +6691,7 @@
                 <a:latin typeface="Meiryo UI"/>
                 <a:ea typeface="Meiryo UI"/>
               </a:rPr>
-              <a:t>10</a:t>
+              <a:t>11</a:t>
             </a:r>
           </a:p>
         </p:txBody>
@@ -8282,8 +9416,8 @@
         </p:nvSpPr>
         <p:spPr>
           <a:xfrm>
-            <a:off x="274320" y="5276088"/>
-            <a:ext cx="11643055" cy="1234440"/>
+            <a:off x="274320" y="4727448"/>
+            <a:ext cx="11643055" cy="1783080"/>
           </a:xfrm>
           <a:prstGeom prst="rect">
             <a:avLst/>
@@ -8328,7 +9462,7 @@
         </p:nvSpPr>
         <p:spPr>
           <a:xfrm>
-            <a:off x="411480" y="5321808"/>
+            <a:off x="411480" y="4773168"/>
             <a:ext cx="3657600" cy="201168"/>
           </a:xfrm>
           <a:prstGeom prst="rect">
@@ -8368,8 +9502,8 @@
         </p:nvSpPr>
         <p:spPr>
           <a:xfrm>
-            <a:off x="411480" y="5550408"/>
-            <a:ext cx="11368735" cy="905256"/>
+            <a:off x="411480" y="5001768"/>
+            <a:ext cx="11368735" cy="1453896"/>
           </a:xfrm>
           <a:prstGeom prst="rect">
             <a:avLst/>
@@ -8391,14 +9525,14 @@
               </a:spcAft>
             </a:pPr>
             <a:r>
-              <a:rPr sz="930" b="0" i="0">
+              <a:rPr sz="840" b="0" i="0">
                 <a:solidFill>
                   <a:srgbClr val="333333"/>
                 </a:solidFill>
                 <a:latin typeface="Meiryo UI"/>
                 <a:ea typeface="Meiryo UI"/>
               </a:rPr>
-              <a:t>・ T-3：カードに説明文がなく次に何ができるか伝わらない → クイックリンクに1行説明を追加 → クリック前に目的地が分かり誤クリック・迷いが減る</a:t>
+              <a:t>・ T-3：カードに説明文がなく次に何ができるか伝わらない → クイックリンクに1行説明を追加 → 誤クリック・迷いの軽減が期待される</a:t>
             </a:r>
           </a:p>
           <a:p>
@@ -8411,14 +9545,14 @@
               </a:spcAft>
             </a:pPr>
             <a:r>
-              <a:rPr sz="930" b="0" i="0">
+              <a:rPr sz="840" b="0" i="0">
                 <a:solidFill>
                   <a:srgbClr val="333333"/>
                 </a:solidFill>
                 <a:latin typeface="Meiryo UI"/>
                 <a:ea typeface="Meiryo UI"/>
               </a:rPr>
-              <a:t>・ T-4：業務依頼フォームとブランドレビュー手順の使い分けが1画面で判別しづらい → 「よく使う窓口」セクションで2入口を並置し使い分けテキストを添える → 依頼者が正しい窓口へ一発到達</a:t>
+              <a:t>・ T-4：業務依頼フォームとブランドレビュー手順の使い分けが1画面で判別しづらい → 「よく使う窓口」セクションで2入口を並置し使い分けテキストを添える → 依頼者が正しい窓口へ到達しやすくなることが期待される</a:t>
             </a:r>
           </a:p>
           <a:p>
@@ -8431,14 +9565,14 @@
               </a:spcAft>
             </a:pPr>
             <a:r>
-              <a:rPr sz="930" b="0" i="0">
+              <a:rPr sz="840" b="0" i="0">
                 <a:solidFill>
                   <a:srgbClr val="333333"/>
                 </a:solidFill>
                 <a:latin typeface="Meiryo UI"/>
                 <a:ea typeface="Meiryo UI"/>
               </a:rPr>
-              <a:t>・ T-1：埋め込みダッシュボードがSPで極小枠＋横スクロールとなり判読不能 → SP表示のみ要約表示に切替 → モバイル利用者にも指標が届く</a:t>
+              <a:t>・ T-1：埋め込みダッシュボードがSPで極小枠＋横スクロールとなり判読不能 → 端末別の表示切替の可否はF0/PoCで検証。確実なL1案としてPC/SP共通で主要指標のテキスト要約＋詳細レポートへのリンクを表示 → モバイル利用者にも指標が届きやすくなることが期待される</a:t>
             </a:r>
           </a:p>
           <a:p>
@@ -8451,7 +9585,7 @@
               </a:spcAft>
             </a:pPr>
             <a:r>
-              <a:rPr sz="930" b="0" i="0">
+              <a:rPr sz="840" b="0" i="0">
                 <a:solidFill>
                   <a:srgbClr val="333333"/>
                 </a:solidFill>
@@ -8479,8 +9613,8 @@
         </p:blipFill>
         <p:spPr>
           <a:xfrm>
-            <a:off x="1672859" y="1645920"/>
-            <a:ext cx="1072775" cy="2450592"/>
+            <a:off x="1989256" y="1645920"/>
+            <a:ext cx="832601" cy="1901952"/>
           </a:xfrm>
           <a:prstGeom prst="rect">
             <a:avLst/>
@@ -8495,7 +9629,7 @@
         </p:nvSpPr>
         <p:spPr>
           <a:xfrm>
-            <a:off x="1614887" y="4105656"/>
+            <a:off x="1811197" y="3557016"/>
             <a:ext cx="1188720" cy="137160"/>
           </a:xfrm>
           <a:prstGeom prst="rect">
@@ -8543,8 +9677,8 @@
         </p:blipFill>
         <p:spPr>
           <a:xfrm>
-            <a:off x="2837074" y="1645920"/>
-            <a:ext cx="1753704" cy="2450592"/>
+            <a:off x="2913297" y="1645920"/>
+            <a:ext cx="1361084" cy="1901952"/>
           </a:xfrm>
           <a:prstGeom prst="rect">
             <a:avLst/>
@@ -8559,8 +9693,8 @@
         </p:nvSpPr>
         <p:spPr>
           <a:xfrm>
-            <a:off x="2837074" y="4105656"/>
-            <a:ext cx="1753704" cy="137160"/>
+            <a:off x="2913297" y="3557016"/>
+            <a:ext cx="1361084" cy="137160"/>
           </a:xfrm>
           <a:prstGeom prst="rect">
             <a:avLst/>
@@ -8599,7 +9733,7 @@
         </p:nvSpPr>
         <p:spPr>
           <a:xfrm>
-            <a:off x="320040" y="4334256"/>
+            <a:off x="320040" y="3785616"/>
             <a:ext cx="5623560" cy="201168"/>
           </a:xfrm>
           <a:prstGeom prst="rect">
@@ -8639,7 +9773,7 @@
         </p:nvSpPr>
         <p:spPr>
           <a:xfrm>
-            <a:off x="320040" y="4572000"/>
+            <a:off x="320040" y="4023360"/>
             <a:ext cx="5623560" cy="1371600"/>
           </a:xfrm>
           <a:prstGeom prst="rect">
@@ -8790,8 +9924,8 @@
         </p:blipFill>
         <p:spPr>
           <a:xfrm>
-            <a:off x="7240566" y="1645920"/>
-            <a:ext cx="3578266" cy="3538728"/>
+            <a:off x="7540825" y="1645920"/>
+            <a:ext cx="2977749" cy="2990088"/>
           </a:xfrm>
           <a:prstGeom prst="rect">
             <a:avLst/>
@@ -9103,7 +10237,7 @@
                 <a:latin typeface="Meiryo UI"/>
                 <a:ea typeface="Meiryo UI"/>
               </a:rPr>
-              <a:t>対象課題：B-1（最重要）／B-2（最重要）／B-6／B-5　※直近30日 最多閲覧ページ（319名）</a:t>
+              <a:t>対象課題：B-1（最重要）／B-2／B-6／B-5　※直近30日 最多閲覧ページ（319名）</a:t>
             </a:r>
           </a:p>
         </p:txBody>
@@ -9484,7 +10618,7 @@
                 <a:latin typeface="Meiryo UI"/>
                 <a:ea typeface="Meiryo UI"/>
               </a:rPr>
-              <a:t>・ B-1（最重要）：1ページに全情報を積層しページ内ナビが皆無、目的の情報に辿り着けない → 7項目のページ内目次を冒頭に新設 → 直近30日で最多利用（319名）のページの到達性が改善し効果が最も広く届く</a:t>
+              <a:t>・ B-1（最重要）：1ページに全情報を積層しページ内ナビが皆無、目的の情報に辿り着けない → 7項目（案・棚卸し後に確定）のページ内目次を冒頭に新設 → 直近30日で最多利用（319名）のページの到達性が改善し効果が最も広く届く</a:t>
             </a:r>
           </a:p>
           <a:p>
@@ -9504,7 +10638,7 @@
                 <a:latin typeface="Meiryo UI"/>
                 <a:ea typeface="Meiryo UI"/>
               </a:rPr>
-              <a:t>・ B-2（最重要）：ガイドライン約10本が粒度・目的バラバラにフラット列挙 → 目的軸4カテゴリのドキュメントライブラリ＋メタデータ列で束ね直す → 目的の資料への選択時間が短縮</a:t>
+              <a:t>・ B-2（重要）：ガイドライン約10本が粒度・目的バラバラにフラット列挙 → 目的軸4カテゴリ（案・棚卸し後に確定）のドキュメントライブラリ＋メタデータ列で束ね直す → 目的の資料への選択時間の短縮が期待される</a:t>
             </a:r>
           </a:p>
         </p:txBody>
@@ -9806,8 +10940,8 @@
         </p:blipFill>
         <p:spPr>
           <a:xfrm>
-            <a:off x="7191756" y="1645920"/>
-            <a:ext cx="3675888" cy="3675888"/>
+            <a:off x="7226622" y="1645920"/>
+            <a:ext cx="3606155" cy="3675888"/>
           </a:xfrm>
           <a:prstGeom prst="rect">
             <a:avLst/>
@@ -10560,7 +11694,7 @@
                 <a:latin typeface="Meiryo UI"/>
                 <a:ea typeface="Meiryo UI"/>
               </a:rPr>
-              <a:t>・ B-7：モバイルは各セクションを折りたたみ表示にし、目次からのアンカー遷移を主動線にすることで長尺化を体感上緩和</a:t>
+              <a:t>・ B-7：SP版が極端に長尺（PC 8,203px／SP 12,196px） → 目次・アンカー中心の導線＋目的別セクション再編／ページ分割を軸に整理。折りたたみUIの採否はF0で確認 → モバイルでの回遊性向上が期待される</a:t>
             </a:r>
           </a:p>
         </p:txBody>
@@ -12686,7 +13820,7 @@
                 <a:latin typeface="Meiryo UI"/>
                 <a:ea typeface="Meiryo UI"/>
               </a:rPr>
-              <a:t>・ CA-1（最重要）：マスター資料が「各チームに直接連絡」で完結し資料が入手できない → ドキュメントライブラリへの直リンク＋クイックリンクに置換、連絡先はメタデータとして保持 → 「見つからずメール検索」を誘発する典型例を最短コストで即時解消（クイックウィン）</a:t>
+              <a:t>・ CA-1（最重要）：マスター資料が「各チームに直接連絡」で完結し資料が入手できない → ドキュメントライブラリへの直リンク＋クイックリンクに置換、連絡先はメタデータとして保持 → 「見つからずメール検索」を誘発する典型例を短期間で改善（追加ライセンス費ゼロ想定。既存資料・権限・保管場所の確認を着手条件とする／クイックウィン）</a:t>
             </a:r>
           </a:p>
           <a:p>
@@ -12963,7 +14097,7 @@
                 <a:latin typeface="Meiryo UI"/>
                 <a:ea typeface="Meiryo UI"/>
               </a:rPr>
-              <a:t>クイックウィン：L1（既存パーツ）・費用ゼロで即着手可能。docs/02 §5・§8の最優先クイックウィンに一致。</a:t>
+              <a:t>クイックウィン：L1（既存パーツ）・追加ライセンス費ゼロ想定。既存資料・権限・保管場所の確認を着手条件に着手可能。docs/02 §5・§8の最優先クイックウィンに一致。</a:t>
             </a:r>
           </a:p>
         </p:txBody>
@@ -13654,7 +14788,7 @@
                 <a:latin typeface="Meiryo UI"/>
                 <a:ea typeface="Meiryo UI"/>
               </a:rPr>
-              <a:t>・ P-1：Akkodis ASP Teamのみ画像枠が破綻し体裁が揃わない → 現物確認の上、画像差し替えまたは枠削除で他2チームと構造を統一 → 3パートナーの見え方の一貫性を回復（低コスト・クイックウィン）</a:t>
+              <a:t>・ P-1：Akkodis ASP Teamだけ余分な画像枠が表示され体裁が揃わない（原因は要現物確認） → 差し替えor削除は現物確認後に決定し、他2チームと構造をそろえる → 3パートナーの見え方の一貫性向上が期待される（低コスト・クイックウィン）</a:t>
             </a:r>
           </a:p>
           <a:p>
@@ -13895,7 +15029,7 @@
                 <a:latin typeface="Meiryo UI"/>
                 <a:ea typeface="Meiryo UI"/>
               </a:rPr>
-              <a:t>P-1　ASPチームだけ画像が読み込まれず体裁が崩れる</a:t>
+              <a:t>P-1　Akkodis ASP Teamだけ余分な画像枠が表示（原因は要現物確認）</a:t>
             </a:r>
           </a:p>
           <a:p>
@@ -15222,7 +16356,7 @@
                 <a:latin typeface="Meiryo UI"/>
                 <a:ea typeface="Meiryo UI"/>
               </a:rPr>
-              <a:t>・ [検索ボックス web part]（G-2対応の核）：全ページヘッダー直下・共通位置に常設。Microsoft Search＋[ハイライトされたコンテンツ web part]の動的クエリを組合せ。高度ファセットはL2/L3のため将来拡張</a:t>
+              <a:t>・ [検索ボックス web part]（G-2対応の核）：全ページヘッダー直下・共通位置に常設。Microsoft Search＋[ハイライトされたコンテンツ web part]の動的クエリを組合せ。高度ファセットはL3（PnP採用時）／標準リファイナーはL1範囲をF0で確認</a:t>
             </a:r>
           </a:p>
           <a:p>
@@ -15431,7 +16565,7 @@
                 <a:latin typeface="Meiryo UI"/>
                 <a:ea typeface="Meiryo UI"/>
               </a:rPr>
-              <a:t>・ G-2（最重要）：標準検索はあるがページ内の絞り込み・ファセットがなく「見つからない→メール検索」の核心原因 → 全ページ共通位置に検索ボックス＋ハイライトされたコンテンツを設置 → 発見性の底上げ。将来的にファセット（L3）・AIアシスタント（L2）へ段階拡張</a:t>
+              <a:t>・ G-2（最重要）：標準検索はあるがページ内の絞り込み・ファセットがなく「見つからない→メール検索」の核心原因 → 検索入口と対象の整理＋メタデータ整備による基礎改善（全ページ共通位置に検索ボックス＋ハイライトされたコンテンツを設置） → 発見性の底上げが期待される。高度な絞り込み（ファセット）は標準リファイナー（一部L1）／PnP Modern Search（L3）で段階拡張</a:t>
             </a:r>
           </a:p>
           <a:p>
